--- a/2026.9.9 CIM Roofline 邵瀚雍.pptx
+++ b/2026.9.9 CIM Roofline 邵瀚雍.pptx
@@ -5,7 +5,7 @@
     <p:sldMasterId id="2147483661" r:id="rId1"/>
   </p:sldMasterIdLst>
   <p:notesMasterIdLst>
-    <p:notesMasterId r:id="rId14"/>
+    <p:notesMasterId r:id="rId16"/>
   </p:notesMasterIdLst>
   <p:sldIdLst>
     <p:sldId id="256" r:id="rId2"/>
@@ -20,6 +20,8 @@
     <p:sldId id="387" r:id="rId11"/>
     <p:sldId id="388" r:id="rId12"/>
     <p:sldId id="389" r:id="rId13"/>
+    <p:sldId id="394" r:id="rId14"/>
+    <p:sldId id="395" r:id="rId15"/>
   </p:sldIdLst>
   <p:sldSz cx="12192000" cy="6858000"/>
   <p:notesSz cx="6858000" cy="9144000"/>
@@ -150,6 +152,172 @@
 
 <file path=ppt/changesInfos/changesInfo1.xml><?xml version="1.0" encoding="utf-8"?>
 <pc:chgInfo xmlns:a="http://schemas.openxmlformats.org/drawingml/2006/main" xmlns:r="http://schemas.openxmlformats.org/officeDocument/2006/relationships" xmlns:ac="http://schemas.microsoft.com/office/drawing/2013/main/command" xmlns:pc="http://schemas.microsoft.com/office/powerpoint/2013/main/command">
+  <pc:docChgLst>
+    <pc:chgData name="H. Shine" userId="fc27ff59f79380b6" providerId="LiveId" clId="{727D2BB6-718A-5CC8-AEE7-01241D467CEF}"/>
+    <pc:docChg chg="undo custSel addSld delSld modSld">
+      <pc:chgData name="H. Shine" userId="fc27ff59f79380b6" providerId="LiveId" clId="{727D2BB6-718A-5CC8-AEE7-01241D467CEF}" dt="2026-09-08T08:14:32.944" v="467" actId="1076"/>
+      <pc:docMkLst>
+        <pc:docMk/>
+      </pc:docMkLst>
+      <pc:sldChg chg="delSp modSp add del mod">
+        <pc:chgData name="H. Shine" userId="fc27ff59f79380b6" providerId="LiveId" clId="{727D2BB6-718A-5CC8-AEE7-01241D467CEF}" dt="2026-09-08T08:10:12.638" v="40" actId="2696"/>
+        <pc:sldMkLst>
+          <pc:docMk/>
+          <pc:sldMk cId="559978104" sldId="394"/>
+        </pc:sldMkLst>
+        <pc:spChg chg="mod">
+          <ac:chgData name="H. Shine" userId="fc27ff59f79380b6" providerId="LiveId" clId="{727D2BB6-718A-5CC8-AEE7-01241D467CEF}" dt="2026-09-08T08:10:10.919" v="39" actId="20577"/>
+          <ac:spMkLst>
+            <pc:docMk/>
+            <pc:sldMk cId="559978104" sldId="394"/>
+            <ac:spMk id="4" creationId="{63C3876A-6E06-92C1-DBAA-70FE1C847D58}"/>
+          </ac:spMkLst>
+        </pc:spChg>
+        <pc:picChg chg="del">
+          <ac:chgData name="H. Shine" userId="fc27ff59f79380b6" providerId="LiveId" clId="{727D2BB6-718A-5CC8-AEE7-01241D467CEF}" dt="2026-09-08T08:10:03.609" v="3" actId="478"/>
+          <ac:picMkLst>
+            <pc:docMk/>
+            <pc:sldMk cId="559978104" sldId="394"/>
+            <ac:picMk id="8" creationId="{81137D94-7B14-99D7-A776-1AC23BF122C9}"/>
+          </ac:picMkLst>
+        </pc:picChg>
+        <pc:picChg chg="del">
+          <ac:chgData name="H. Shine" userId="fc27ff59f79380b6" providerId="LiveId" clId="{727D2BB6-718A-5CC8-AEE7-01241D467CEF}" dt="2026-09-08T08:10:04.043" v="4" actId="478"/>
+          <ac:picMkLst>
+            <pc:docMk/>
+            <pc:sldMk cId="559978104" sldId="394"/>
+            <ac:picMk id="10" creationId="{6F7247C9-2EF9-D52F-09F8-F6BCAA2D5B69}"/>
+          </ac:picMkLst>
+        </pc:picChg>
+        <pc:picChg chg="del">
+          <ac:chgData name="H. Shine" userId="fc27ff59f79380b6" providerId="LiveId" clId="{727D2BB6-718A-5CC8-AEE7-01241D467CEF}" dt="2026-09-08T08:10:02.994" v="1" actId="478"/>
+          <ac:picMkLst>
+            <pc:docMk/>
+            <pc:sldMk cId="559978104" sldId="394"/>
+            <ac:picMk id="13" creationId="{23586267-9FB5-BA1E-EC26-710E91C87FDD}"/>
+          </ac:picMkLst>
+        </pc:picChg>
+        <pc:picChg chg="del">
+          <ac:chgData name="H. Shine" userId="fc27ff59f79380b6" providerId="LiveId" clId="{727D2BB6-718A-5CC8-AEE7-01241D467CEF}" dt="2026-09-08T08:10:03.318" v="2" actId="478"/>
+          <ac:picMkLst>
+            <pc:docMk/>
+            <pc:sldMk cId="559978104" sldId="394"/>
+            <ac:picMk id="14" creationId="{196B7E64-55B9-FEA0-2525-A3FDBEBB17D8}"/>
+          </ac:picMkLst>
+        </pc:picChg>
+      </pc:sldChg>
+      <pc:sldChg chg="addSp delSp modSp add mod">
+        <pc:chgData name="H. Shine" userId="fc27ff59f79380b6" providerId="LiveId" clId="{727D2BB6-718A-5CC8-AEE7-01241D467CEF}" dt="2026-09-08T08:13:00.896" v="264"/>
+        <pc:sldMkLst>
+          <pc:docMk/>
+          <pc:sldMk cId="2128394541" sldId="394"/>
+        </pc:sldMkLst>
+        <pc:spChg chg="mod">
+          <ac:chgData name="H. Shine" userId="fc27ff59f79380b6" providerId="LiveId" clId="{727D2BB6-718A-5CC8-AEE7-01241D467CEF}" dt="2026-09-08T08:12:58.211" v="261" actId="20577"/>
+          <ac:spMkLst>
+            <pc:docMk/>
+            <pc:sldMk cId="2128394541" sldId="394"/>
+            <ac:spMk id="5" creationId="{097E4037-9F5D-AA07-675D-5B93B763BA2E}"/>
+          </ac:spMkLst>
+        </pc:spChg>
+        <pc:spChg chg="add del mod">
+          <ac:chgData name="H. Shine" userId="fc27ff59f79380b6" providerId="LiveId" clId="{727D2BB6-718A-5CC8-AEE7-01241D467CEF}" dt="2026-09-08T08:13:00.896" v="264"/>
+          <ac:spMkLst>
+            <pc:docMk/>
+            <pc:sldMk cId="2128394541" sldId="394"/>
+            <ac:spMk id="9" creationId="{97323E1D-2679-87F5-56D0-398A166672F8}"/>
+          </ac:spMkLst>
+        </pc:spChg>
+        <pc:picChg chg="del mod">
+          <ac:chgData name="H. Shine" userId="fc27ff59f79380b6" providerId="LiveId" clId="{727D2BB6-718A-5CC8-AEE7-01241D467CEF}" dt="2026-09-08T08:10:19.789" v="46" actId="478"/>
+          <ac:picMkLst>
+            <pc:docMk/>
+            <pc:sldMk cId="2128394541" sldId="394"/>
+            <ac:picMk id="6" creationId="{21ECD395-9A93-9FC9-C681-84520454E4EF}"/>
+          </ac:picMkLst>
+        </pc:picChg>
+        <pc:picChg chg="add mod">
+          <ac:chgData name="H. Shine" userId="fc27ff59f79380b6" providerId="LiveId" clId="{727D2BB6-718A-5CC8-AEE7-01241D467CEF}" dt="2026-09-08T08:12:45.292" v="237" actId="14100"/>
+          <ac:picMkLst>
+            <pc:docMk/>
+            <pc:sldMk cId="2128394541" sldId="394"/>
+            <ac:picMk id="7" creationId="{486DBD95-8B49-00C9-64A3-17D7FF498146}"/>
+          </ac:picMkLst>
+        </pc:picChg>
+        <pc:picChg chg="add mod">
+          <ac:chgData name="H. Shine" userId="fc27ff59f79380b6" providerId="LiveId" clId="{727D2BB6-718A-5CC8-AEE7-01241D467CEF}" dt="2026-09-08T08:12:49.169" v="239" actId="1076"/>
+          <ac:picMkLst>
+            <pc:docMk/>
+            <pc:sldMk cId="2128394541" sldId="394"/>
+            <ac:picMk id="8" creationId="{AEEBBD8D-F9B6-94E0-26F8-699F3DFF1590}"/>
+          </ac:picMkLst>
+        </pc:picChg>
+        <pc:picChg chg="del">
+          <ac:chgData name="H. Shine" userId="fc27ff59f79380b6" providerId="LiveId" clId="{727D2BB6-718A-5CC8-AEE7-01241D467CEF}" dt="2026-09-08T08:10:17.928" v="42" actId="478"/>
+          <ac:picMkLst>
+            <pc:docMk/>
+            <pc:sldMk cId="2128394541" sldId="394"/>
+            <ac:picMk id="10" creationId="{F6F2F10E-BC82-8CA7-840C-0E8DC1ADDDE6}"/>
+          </ac:picMkLst>
+        </pc:picChg>
+        <pc:picChg chg="del">
+          <ac:chgData name="H. Shine" userId="fc27ff59f79380b6" providerId="LiveId" clId="{727D2BB6-718A-5CC8-AEE7-01241D467CEF}" dt="2026-09-08T08:10:18.823" v="44" actId="478"/>
+          <ac:picMkLst>
+            <pc:docMk/>
+            <pc:sldMk cId="2128394541" sldId="394"/>
+            <ac:picMk id="12" creationId="{68A8AC74-9769-7BC6-28B6-743CDBFA8329}"/>
+          </ac:picMkLst>
+        </pc:picChg>
+        <pc:picChg chg="del">
+          <ac:chgData name="H. Shine" userId="fc27ff59f79380b6" providerId="LiveId" clId="{727D2BB6-718A-5CC8-AEE7-01241D467CEF}" dt="2026-09-08T08:10:18.539" v="43" actId="478"/>
+          <ac:picMkLst>
+            <pc:docMk/>
+            <pc:sldMk cId="2128394541" sldId="394"/>
+            <ac:picMk id="13" creationId="{4468C7D5-27DD-153B-D042-9E20B9C5881E}"/>
+          </ac:picMkLst>
+        </pc:picChg>
+      </pc:sldChg>
+      <pc:sldChg chg="addSp delSp modSp add mod">
+        <pc:chgData name="H. Shine" userId="fc27ff59f79380b6" providerId="LiveId" clId="{727D2BB6-718A-5CC8-AEE7-01241D467CEF}" dt="2026-09-08T08:14:32.944" v="467" actId="1076"/>
+        <pc:sldMkLst>
+          <pc:docMk/>
+          <pc:sldMk cId="1139044376" sldId="395"/>
+        </pc:sldMkLst>
+        <pc:spChg chg="mod">
+          <ac:chgData name="H. Shine" userId="fc27ff59f79380b6" providerId="LiveId" clId="{727D2BB6-718A-5CC8-AEE7-01241D467CEF}" dt="2026-09-08T08:14:29.696" v="464" actId="20577"/>
+          <ac:spMkLst>
+            <pc:docMk/>
+            <pc:sldMk cId="1139044376" sldId="395"/>
+            <ac:spMk id="5" creationId="{4F0788C6-5D5E-F5A6-790A-33AF029F223D}"/>
+          </ac:spMkLst>
+        </pc:spChg>
+        <pc:picChg chg="add mod">
+          <ac:chgData name="H. Shine" userId="fc27ff59f79380b6" providerId="LiveId" clId="{727D2BB6-718A-5CC8-AEE7-01241D467CEF}" dt="2026-09-08T08:14:32.944" v="467" actId="1076"/>
+          <ac:picMkLst>
+            <pc:docMk/>
+            <pc:sldMk cId="1139044376" sldId="395"/>
+            <ac:picMk id="6" creationId="{AC25EBB9-AE1F-F80B-A8DE-B740F21E5CF0}"/>
+          </ac:picMkLst>
+        </pc:picChg>
+        <pc:picChg chg="del">
+          <ac:chgData name="H. Shine" userId="fc27ff59f79380b6" providerId="LiveId" clId="{727D2BB6-718A-5CC8-AEE7-01241D467CEF}" dt="2026-09-08T08:13:11.960" v="267" actId="478"/>
+          <ac:picMkLst>
+            <pc:docMk/>
+            <pc:sldMk cId="1139044376" sldId="395"/>
+            <ac:picMk id="7" creationId="{8CAAD5D6-96E8-244F-3438-A56C6E5EFE98}"/>
+          </ac:picMkLst>
+        </pc:picChg>
+        <pc:picChg chg="del">
+          <ac:chgData name="H. Shine" userId="fc27ff59f79380b6" providerId="LiveId" clId="{727D2BB6-718A-5CC8-AEE7-01241D467CEF}" dt="2026-09-08T08:13:11.677" v="266" actId="478"/>
+          <ac:picMkLst>
+            <pc:docMk/>
+            <pc:sldMk cId="1139044376" sldId="395"/>
+            <ac:picMk id="8" creationId="{71774A27-357F-E7D6-C93C-F7180BA5B20C}"/>
+          </ac:picMkLst>
+        </pc:picChg>
+      </pc:sldChg>
+    </pc:docChg>
+  </pc:docChgLst>
   <pc:docChgLst>
     <pc:chgData name="H. Shine" userId="fc27ff59f79380b6" providerId="LiveId" clId="{49B3E6E0-4B1E-4AD6-A829-DE648B7A64C9}"/>
     <pc:docChg chg="undo custSel addSld delSld modSld sldOrd">
@@ -931,7 +1099,7 @@
           <a:p>
             <a:fld id="{A111C8C9-373A-574A-9755-80D04E77005E}" type="datetimeFigureOut">
               <a:rPr kumimoji="1" lang="zh-CN" altLang="en-US" smtClean="0"/>
-              <a:t>2026/9/7</a:t>
+              <a:t>2026/9/8</a:t>
             </a:fld>
             <a:endParaRPr kumimoji="1" lang="zh-CN" altLang="en-US"/>
           </a:p>
@@ -1196,6 +1364,90 @@
     </a:lvl9pPr>
   </p:notesStyle>
 </p:notesMaster>
+</file>
+
+<file path=ppt/notesSlides/notesSlide1.xml><?xml version="1.0" encoding="utf-8"?>
+<p:notes xmlns:a="http://schemas.openxmlformats.org/drawingml/2006/main" xmlns:r="http://schemas.openxmlformats.org/officeDocument/2006/relationships" xmlns:p="http://schemas.openxmlformats.org/presentationml/2006/main">
+  <p:cSld>
+    <p:spTree>
+      <p:nvGrpSpPr>
+        <p:cNvPr id="1" name=""/>
+        <p:cNvGrpSpPr/>
+        <p:nvPr/>
+      </p:nvGrpSpPr>
+      <p:grpSpPr>
+        <a:xfrm>
+          <a:off x="0" y="0"/>
+          <a:ext cx="0" cy="0"/>
+          <a:chOff x="0" y="0"/>
+          <a:chExt cx="0" cy="0"/>
+        </a:xfrm>
+      </p:grpSpPr>
+      <p:sp>
+        <p:nvSpPr>
+          <p:cNvPr id="2" name="幻灯片图像占位符 1"/>
+          <p:cNvSpPr>
+            <a:spLocks noGrp="1" noRot="1" noChangeAspect="1"/>
+          </p:cNvSpPr>
+          <p:nvPr>
+            <p:ph type="sldImg"/>
+          </p:nvPr>
+        </p:nvSpPr>
+        <p:spPr/>
+      </p:sp>
+      <p:sp>
+        <p:nvSpPr>
+          <p:cNvPr id="3" name="备注占位符 2"/>
+          <p:cNvSpPr>
+            <a:spLocks noGrp="1"/>
+          </p:cNvSpPr>
+          <p:nvPr>
+            <p:ph type="body" idx="1"/>
+          </p:nvPr>
+        </p:nvSpPr>
+        <p:spPr/>
+        <p:txBody>
+          <a:bodyPr/>
+          <a:lstStyle/>
+          <a:p>
+            <a:endParaRPr kumimoji="1" lang="zh-CN" altLang="en-US" dirty="0"/>
+          </a:p>
+        </p:txBody>
+      </p:sp>
+      <p:sp>
+        <p:nvSpPr>
+          <p:cNvPr id="4" name="灯片编号占位符 3"/>
+          <p:cNvSpPr>
+            <a:spLocks noGrp="1"/>
+          </p:cNvSpPr>
+          <p:nvPr>
+            <p:ph type="sldNum" sz="quarter" idx="5"/>
+          </p:nvPr>
+        </p:nvSpPr>
+        <p:spPr/>
+        <p:txBody>
+          <a:bodyPr/>
+          <a:lstStyle/>
+          <a:p>
+            <a:fld id="{A1762D5B-0E32-3D49-B207-A22F47C1AAFC}" type="slidenum">
+              <a:rPr kumimoji="1" lang="zh-CN" altLang="en-US" smtClean="0"/>
+              <a:t>13</a:t>
+            </a:fld>
+            <a:endParaRPr kumimoji="1" lang="zh-CN" altLang="en-US"/>
+          </a:p>
+        </p:txBody>
+      </p:sp>
+    </p:spTree>
+    <p:extLst>
+      <p:ext uri="{BB962C8B-B14F-4D97-AF65-F5344CB8AC3E}">
+        <p14:creationId xmlns:p14="http://schemas.microsoft.com/office/powerpoint/2010/main" val="622224945"/>
+      </p:ext>
+    </p:extLst>
+  </p:cSld>
+  <p:clrMapOvr>
+    <a:masterClrMapping/>
+  </p:clrMapOvr>
+</p:notes>
 </file>
 
 <file path=ppt/slideLayouts/slideLayout1.xml><?xml version="1.0" encoding="utf-8"?>
@@ -3993,6 +4245,932 @@
     <p:extLst>
       <p:ext uri="{BB962C8B-B14F-4D97-AF65-F5344CB8AC3E}">
         <p14:creationId xmlns:p14="http://schemas.microsoft.com/office/powerpoint/2010/main" val="4100147550"/>
+      </p:ext>
+    </p:extLst>
+  </p:cSld>
+  <p:clrMapOvr>
+    <a:masterClrMapping/>
+  </p:clrMapOvr>
+</p:sld>
+</file>
+
+<file path=ppt/slides/slide13.xml><?xml version="1.0" encoding="utf-8"?>
+<p:sld xmlns:a="http://schemas.openxmlformats.org/drawingml/2006/main" xmlns:r="http://schemas.openxmlformats.org/officeDocument/2006/relationships" xmlns:p="http://schemas.openxmlformats.org/presentationml/2006/main">
+  <p:cSld>
+    <p:spTree>
+      <p:nvGrpSpPr>
+        <p:cNvPr id="1" name="">
+          <a:extLst>
+            <a:ext uri="{FF2B5EF4-FFF2-40B4-BE49-F238E27FC236}">
+              <a16:creationId xmlns:a16="http://schemas.microsoft.com/office/drawing/2014/main" id="{BBF52571-8665-09B4-AA35-22D85DA40573}"/>
+            </a:ext>
+          </a:extLst>
+        </p:cNvPr>
+        <p:cNvGrpSpPr/>
+        <p:nvPr/>
+      </p:nvGrpSpPr>
+      <p:grpSpPr>
+        <a:xfrm>
+          <a:off x="0" y="0"/>
+          <a:ext cx="0" cy="0"/>
+          <a:chOff x="0" y="0"/>
+          <a:chExt cx="0" cy="0"/>
+        </a:xfrm>
+      </p:grpSpPr>
+      <p:sp>
+        <p:nvSpPr>
+          <p:cNvPr id="2" name="灯片编号占位符 1">
+            <a:extLst>
+              <a:ext uri="{FF2B5EF4-FFF2-40B4-BE49-F238E27FC236}">
+                <a16:creationId xmlns:a16="http://schemas.microsoft.com/office/drawing/2014/main" id="{B72BC601-11AD-4B37-14E9-97FE5179F634}"/>
+              </a:ext>
+            </a:extLst>
+          </p:cNvPr>
+          <p:cNvSpPr>
+            <a:spLocks noGrp="1"/>
+          </p:cNvSpPr>
+          <p:nvPr>
+            <p:ph type="sldNum" sz="quarter" idx="12"/>
+          </p:nvPr>
+        </p:nvSpPr>
+        <p:spPr/>
+        <p:txBody>
+          <a:bodyPr/>
+          <a:lstStyle/>
+          <a:p>
+            <a:fld id="{0EEC669C-3A94-5645-80F3-ED04B501DFEC}" type="slidenum">
+              <a:rPr lang="en-US" altLang="zh-CN" smtClean="0"/>
+              <a:pPr/>
+              <a:t>12</a:t>
+            </a:fld>
+            <a:endParaRPr lang="zh-CN" altLang="en-US"/>
+          </a:p>
+        </p:txBody>
+      </p:sp>
+      <p:sp>
+        <p:nvSpPr>
+          <p:cNvPr id="3" name="标题 2">
+            <a:extLst>
+              <a:ext uri="{FF2B5EF4-FFF2-40B4-BE49-F238E27FC236}">
+                <a16:creationId xmlns:a16="http://schemas.microsoft.com/office/drawing/2014/main" id="{9CCCB0DA-B584-2BA0-B627-67AD5A948D27}"/>
+              </a:ext>
+            </a:extLst>
+          </p:cNvPr>
+          <p:cNvSpPr>
+            <a:spLocks noGrp="1"/>
+          </p:cNvSpPr>
+          <p:nvPr>
+            <p:ph type="title"/>
+          </p:nvPr>
+        </p:nvSpPr>
+        <p:spPr/>
+        <p:txBody>
+          <a:bodyPr/>
+          <a:lstStyle/>
+          <a:p>
+            <a:r>
+              <a:rPr lang="zh-CN" altLang="en-US" dirty="0"/>
+              <a:t>工作</a:t>
+            </a:r>
+          </a:p>
+        </p:txBody>
+      </p:sp>
+      <p:sp>
+        <p:nvSpPr>
+          <p:cNvPr id="4" name="内容占位符 3">
+            <a:extLst>
+              <a:ext uri="{FF2B5EF4-FFF2-40B4-BE49-F238E27FC236}">
+                <a16:creationId xmlns:a16="http://schemas.microsoft.com/office/drawing/2014/main" id="{8BA9058B-D8E2-85C2-1EC7-23574C79797C}"/>
+              </a:ext>
+            </a:extLst>
+          </p:cNvPr>
+          <p:cNvSpPr>
+            <a:spLocks noGrp="1"/>
+          </p:cNvSpPr>
+          <p:nvPr>
+            <p:ph idx="1"/>
+          </p:nvPr>
+        </p:nvSpPr>
+        <p:spPr>
+          <a:xfrm>
+            <a:off x="433801" y="1230122"/>
+            <a:ext cx="10966163" cy="369332"/>
+          </a:xfrm>
+        </p:spPr>
+        <p:txBody>
+          <a:bodyPr/>
+          <a:lstStyle/>
+          <a:p>
+            <a:r>
+              <a:rPr lang="zh-CN" altLang="en-US" dirty="0"/>
+              <a:t>论文的后半部分分析</a:t>
+            </a:r>
+          </a:p>
+        </p:txBody>
+      </p:sp>
+      <p:sp>
+        <p:nvSpPr>
+          <p:cNvPr id="5" name="内容占位符 4">
+            <a:extLst>
+              <a:ext uri="{FF2B5EF4-FFF2-40B4-BE49-F238E27FC236}">
+                <a16:creationId xmlns:a16="http://schemas.microsoft.com/office/drawing/2014/main" id="{097E4037-9F5D-AA07-675D-5B93B763BA2E}"/>
+              </a:ext>
+            </a:extLst>
+          </p:cNvPr>
+          <p:cNvSpPr>
+            <a:spLocks noGrp="1"/>
+          </p:cNvSpPr>
+          <p:nvPr>
+            <p:ph idx="13"/>
+          </p:nvPr>
+        </p:nvSpPr>
+        <p:spPr>
+          <a:xfrm>
+            <a:off x="696000" y="1860189"/>
+            <a:ext cx="11496000" cy="918200"/>
+          </a:xfrm>
+        </p:spPr>
+        <p:txBody>
+          <a:bodyPr/>
+          <a:lstStyle/>
+          <a:p>
+            <a:pPr>
+              <a:spcAft>
+                <a:spcPts val="600"/>
+              </a:spcAft>
+            </a:pPr>
+            <a:r>
+              <a:rPr lang="zh-CN" altLang="en-US" sz="1600" dirty="0">
+                <a:solidFill>
+                  <a:schemeClr val="tx1"/>
+                </a:solidFill>
+                <a:ea typeface="黑体" panose="02010609060101010101" pitchFamily="49" charset="-122"/>
+                <a:cs typeface="Arial" panose="020B0604020202020204" pitchFamily="34" charset="0"/>
+              </a:rPr>
+              <a:t>现在正在针对性的，分析不同</a:t>
+            </a:r>
+            <a:r>
+              <a:rPr lang="en-US" altLang="zh-CN" sz="1600" dirty="0">
+                <a:solidFill>
+                  <a:schemeClr val="tx1"/>
+                </a:solidFill>
+                <a:ea typeface="黑体" panose="02010609060101010101" pitchFamily="49" charset="-122"/>
+                <a:cs typeface="Arial" panose="020B0604020202020204" pitchFamily="34" charset="0"/>
+              </a:rPr>
+              <a:t>NVM</a:t>
+            </a:r>
+            <a:r>
+              <a:rPr lang="zh-CN" altLang="en-US" sz="1600" dirty="0">
+                <a:solidFill>
+                  <a:schemeClr val="tx1"/>
+                </a:solidFill>
+                <a:ea typeface="黑体" panose="02010609060101010101" pitchFamily="49" charset="-122"/>
+                <a:cs typeface="Arial" panose="020B0604020202020204" pitchFamily="34" charset="0"/>
+              </a:rPr>
+              <a:t>存储介质的关键参数</a:t>
+            </a:r>
+            <a:endParaRPr lang="en-US" altLang="zh-CN" sz="1600" dirty="0">
+              <a:solidFill>
+                <a:schemeClr val="tx1"/>
+              </a:solidFill>
+              <a:ea typeface="黑体" panose="02010609060101010101" pitchFamily="49" charset="-122"/>
+              <a:cs typeface="Arial" panose="020B0604020202020204" pitchFamily="34" charset="0"/>
+            </a:endParaRPr>
+          </a:p>
+          <a:p>
+            <a:pPr>
+              <a:spcAft>
+                <a:spcPts val="600"/>
+              </a:spcAft>
+            </a:pPr>
+            <a:endParaRPr lang="en-US" altLang="zh-CN" sz="1600" dirty="0">
+              <a:solidFill>
+                <a:schemeClr val="tx1"/>
+              </a:solidFill>
+              <a:ea typeface="黑体" panose="02010609060101010101" pitchFamily="49" charset="-122"/>
+              <a:cs typeface="Arial" panose="020B0604020202020204" pitchFamily="34" charset="0"/>
+            </a:endParaRPr>
+          </a:p>
+          <a:p>
+            <a:pPr>
+              <a:spcAft>
+                <a:spcPts val="600"/>
+              </a:spcAft>
+            </a:pPr>
+            <a:r>
+              <a:rPr lang="zh-CN" altLang="en-US" sz="1600" b="1" dirty="0">
+                <a:solidFill>
+                  <a:schemeClr val="tx1"/>
+                </a:solidFill>
+                <a:ea typeface="黑体" panose="02010609060101010101" pitchFamily="49" charset="-122"/>
+                <a:cs typeface="Arial" panose="020B0604020202020204" pitchFamily="34" charset="0"/>
+              </a:rPr>
+              <a:t>统一的：</a:t>
+            </a:r>
+            <a:r>
+              <a:rPr lang="en-US" altLang="zh-CN" sz="1600" b="1" dirty="0">
+                <a:solidFill>
+                  <a:schemeClr val="tx1"/>
+                </a:solidFill>
+                <a:ea typeface="黑体" panose="02010609060101010101" pitchFamily="49" charset="-122"/>
+                <a:cs typeface="Arial" panose="020B0604020202020204" pitchFamily="34" charset="0"/>
+              </a:rPr>
+              <a:t>28nm</a:t>
+            </a:r>
+            <a:r>
+              <a:rPr lang="zh-CN" altLang="en-US" sz="1600" b="1" dirty="0">
+                <a:solidFill>
+                  <a:schemeClr val="tx1"/>
+                </a:solidFill>
+                <a:ea typeface="黑体" panose="02010609060101010101" pitchFamily="49" charset="-122"/>
+                <a:cs typeface="Arial" panose="020B0604020202020204" pitchFamily="34" charset="0"/>
+              </a:rPr>
+              <a:t> </a:t>
+            </a:r>
+            <a:r>
+              <a:rPr lang="en-US" altLang="zh-CN" sz="1600" b="1" dirty="0">
+                <a:solidFill>
+                  <a:schemeClr val="tx1"/>
+                </a:solidFill>
+                <a:ea typeface="黑体" panose="02010609060101010101" pitchFamily="49" charset="-122"/>
+                <a:cs typeface="Arial" panose="020B0604020202020204" pitchFamily="34" charset="0"/>
+              </a:rPr>
+              <a:t>CMOS</a:t>
+            </a:r>
+            <a:r>
+              <a:rPr lang="zh-CN" altLang="en-US" sz="1600" b="1" dirty="0">
+                <a:solidFill>
+                  <a:schemeClr val="tx1"/>
+                </a:solidFill>
+                <a:ea typeface="黑体" panose="02010609060101010101" pitchFamily="49" charset="-122"/>
+                <a:cs typeface="Arial" panose="020B0604020202020204" pitchFamily="34" charset="0"/>
+              </a:rPr>
+              <a:t>外围电路（</a:t>
+            </a:r>
+            <a:r>
+              <a:rPr lang="en-US" altLang="zh-CN" sz="1600" b="1" dirty="0">
+                <a:solidFill>
+                  <a:schemeClr val="tx1"/>
+                </a:solidFill>
+                <a:ea typeface="黑体" panose="02010609060101010101" pitchFamily="49" charset="-122"/>
+                <a:cs typeface="Arial" panose="020B0604020202020204" pitchFamily="34" charset="0"/>
+              </a:rPr>
+              <a:t>AD/DA</a:t>
+            </a:r>
+            <a:r>
+              <a:rPr lang="zh-CN" altLang="en-US" sz="1600" b="1" dirty="0">
+                <a:solidFill>
+                  <a:schemeClr val="tx1"/>
+                </a:solidFill>
+                <a:ea typeface="黑体" panose="02010609060101010101" pitchFamily="49" charset="-122"/>
+                <a:cs typeface="Arial" panose="020B0604020202020204" pitchFamily="34" charset="0"/>
+              </a:rPr>
+              <a:t>），计算参数的方法</a:t>
+            </a:r>
+            <a:endParaRPr lang="en-US" altLang="zh-CN" sz="1600" b="1" dirty="0">
+              <a:solidFill>
+                <a:schemeClr val="tx1"/>
+              </a:solidFill>
+              <a:ea typeface="黑体" panose="02010609060101010101" pitchFamily="49" charset="-122"/>
+              <a:cs typeface="Arial" panose="020B0604020202020204" pitchFamily="34" charset="0"/>
+            </a:endParaRPr>
+          </a:p>
+        </p:txBody>
+      </p:sp>
+      <p:pic>
+        <p:nvPicPr>
+          <p:cNvPr id="7" name="图片 6">
+            <a:extLst>
+              <a:ext uri="{FF2B5EF4-FFF2-40B4-BE49-F238E27FC236}">
+                <a16:creationId xmlns:a16="http://schemas.microsoft.com/office/drawing/2014/main" id="{486DBD95-8B49-00C9-64A3-17D7FF498146}"/>
+              </a:ext>
+            </a:extLst>
+          </p:cNvPr>
+          <p:cNvPicPr>
+            <a:picLocks noChangeAspect="1"/>
+          </p:cNvPicPr>
+          <p:nvPr/>
+        </p:nvPicPr>
+        <p:blipFill>
+          <a:blip r:embed="rId2"/>
+          <a:stretch>
+            <a:fillRect/>
+          </a:stretch>
+        </p:blipFill>
+        <p:spPr>
+          <a:xfrm>
+            <a:off x="6567854" y="2225692"/>
+            <a:ext cx="5480077" cy="4494502"/>
+          </a:xfrm>
+          <a:prstGeom prst="rect">
+            <a:avLst/>
+          </a:prstGeom>
+        </p:spPr>
+      </p:pic>
+      <p:pic>
+        <p:nvPicPr>
+          <p:cNvPr id="8" name="图片 7">
+            <a:extLst>
+              <a:ext uri="{FF2B5EF4-FFF2-40B4-BE49-F238E27FC236}">
+                <a16:creationId xmlns:a16="http://schemas.microsoft.com/office/drawing/2014/main" id="{AEEBBD8D-F9B6-94E0-26F8-699F3DFF1590}"/>
+              </a:ext>
+            </a:extLst>
+          </p:cNvPr>
+          <p:cNvPicPr>
+            <a:picLocks noChangeAspect="1"/>
+          </p:cNvPicPr>
+          <p:nvPr/>
+        </p:nvPicPr>
+        <p:blipFill>
+          <a:blip r:embed="rId3"/>
+          <a:stretch>
+            <a:fillRect/>
+          </a:stretch>
+        </p:blipFill>
+        <p:spPr>
+          <a:xfrm>
+            <a:off x="223200" y="3261946"/>
+            <a:ext cx="6053894" cy="3458248"/>
+          </a:xfrm>
+          <a:prstGeom prst="rect">
+            <a:avLst/>
+          </a:prstGeom>
+        </p:spPr>
+      </p:pic>
+    </p:spTree>
+    <p:extLst>
+      <p:ext uri="{BB962C8B-B14F-4D97-AF65-F5344CB8AC3E}">
+        <p14:creationId xmlns:p14="http://schemas.microsoft.com/office/powerpoint/2010/main" val="2128394541"/>
+      </p:ext>
+    </p:extLst>
+  </p:cSld>
+  <p:clrMapOvr>
+    <a:masterClrMapping/>
+  </p:clrMapOvr>
+</p:sld>
+</file>
+
+<file path=ppt/slides/slide14.xml><?xml version="1.0" encoding="utf-8"?>
+<p:sld xmlns:a="http://schemas.openxmlformats.org/drawingml/2006/main" xmlns:r="http://schemas.openxmlformats.org/officeDocument/2006/relationships" xmlns:p="http://schemas.openxmlformats.org/presentationml/2006/main">
+  <p:cSld>
+    <p:spTree>
+      <p:nvGrpSpPr>
+        <p:cNvPr id="1" name="">
+          <a:extLst>
+            <a:ext uri="{FF2B5EF4-FFF2-40B4-BE49-F238E27FC236}">
+              <a16:creationId xmlns:a16="http://schemas.microsoft.com/office/drawing/2014/main" id="{0AC9E5EB-AEBE-D9FE-5957-9E98194246C9}"/>
+            </a:ext>
+          </a:extLst>
+        </p:cNvPr>
+        <p:cNvGrpSpPr/>
+        <p:nvPr/>
+      </p:nvGrpSpPr>
+      <p:grpSpPr>
+        <a:xfrm>
+          <a:off x="0" y="0"/>
+          <a:ext cx="0" cy="0"/>
+          <a:chOff x="0" y="0"/>
+          <a:chExt cx="0" cy="0"/>
+        </a:xfrm>
+      </p:grpSpPr>
+      <p:sp>
+        <p:nvSpPr>
+          <p:cNvPr id="2" name="灯片编号占位符 1">
+            <a:extLst>
+              <a:ext uri="{FF2B5EF4-FFF2-40B4-BE49-F238E27FC236}">
+                <a16:creationId xmlns:a16="http://schemas.microsoft.com/office/drawing/2014/main" id="{F2600CBE-E660-8D7E-CEAC-95522A267E55}"/>
+              </a:ext>
+            </a:extLst>
+          </p:cNvPr>
+          <p:cNvSpPr>
+            <a:spLocks noGrp="1"/>
+          </p:cNvSpPr>
+          <p:nvPr>
+            <p:ph type="sldNum" sz="quarter" idx="12"/>
+          </p:nvPr>
+        </p:nvSpPr>
+        <p:spPr/>
+        <p:txBody>
+          <a:bodyPr/>
+          <a:lstStyle/>
+          <a:p>
+            <a:fld id="{0EEC669C-3A94-5645-80F3-ED04B501DFEC}" type="slidenum">
+              <a:rPr lang="en-US" altLang="zh-CN" smtClean="0"/>
+              <a:pPr/>
+              <a:t>13</a:t>
+            </a:fld>
+            <a:endParaRPr lang="zh-CN" altLang="en-US"/>
+          </a:p>
+        </p:txBody>
+      </p:sp>
+      <p:sp>
+        <p:nvSpPr>
+          <p:cNvPr id="3" name="标题 2">
+            <a:extLst>
+              <a:ext uri="{FF2B5EF4-FFF2-40B4-BE49-F238E27FC236}">
+                <a16:creationId xmlns:a16="http://schemas.microsoft.com/office/drawing/2014/main" id="{96CF67BB-DD54-32B8-5E0E-C2856FE2B2E5}"/>
+              </a:ext>
+            </a:extLst>
+          </p:cNvPr>
+          <p:cNvSpPr>
+            <a:spLocks noGrp="1"/>
+          </p:cNvSpPr>
+          <p:nvPr>
+            <p:ph type="title"/>
+          </p:nvPr>
+        </p:nvSpPr>
+        <p:spPr/>
+        <p:txBody>
+          <a:bodyPr/>
+          <a:lstStyle/>
+          <a:p>
+            <a:r>
+              <a:rPr lang="zh-CN" altLang="en-US" dirty="0"/>
+              <a:t>工作</a:t>
+            </a:r>
+          </a:p>
+        </p:txBody>
+      </p:sp>
+      <p:sp>
+        <p:nvSpPr>
+          <p:cNvPr id="4" name="内容占位符 3">
+            <a:extLst>
+              <a:ext uri="{FF2B5EF4-FFF2-40B4-BE49-F238E27FC236}">
+                <a16:creationId xmlns:a16="http://schemas.microsoft.com/office/drawing/2014/main" id="{054A4FCD-7F5C-3DDB-B429-0D98B3C1E758}"/>
+              </a:ext>
+            </a:extLst>
+          </p:cNvPr>
+          <p:cNvSpPr>
+            <a:spLocks noGrp="1"/>
+          </p:cNvSpPr>
+          <p:nvPr>
+            <p:ph idx="1"/>
+          </p:nvPr>
+        </p:nvSpPr>
+        <p:spPr>
+          <a:xfrm>
+            <a:off x="433801" y="1230122"/>
+            <a:ext cx="10966163" cy="369332"/>
+          </a:xfrm>
+        </p:spPr>
+        <p:txBody>
+          <a:bodyPr/>
+          <a:lstStyle/>
+          <a:p>
+            <a:r>
+              <a:rPr lang="zh-CN" altLang="en-US" dirty="0"/>
+              <a:t>论文的后半部分分析</a:t>
+            </a:r>
+          </a:p>
+        </p:txBody>
+      </p:sp>
+      <p:sp>
+        <p:nvSpPr>
+          <p:cNvPr id="5" name="内容占位符 4">
+            <a:extLst>
+              <a:ext uri="{FF2B5EF4-FFF2-40B4-BE49-F238E27FC236}">
+                <a16:creationId xmlns:a16="http://schemas.microsoft.com/office/drawing/2014/main" id="{4F0788C6-5D5E-F5A6-790A-33AF029F223D}"/>
+              </a:ext>
+            </a:extLst>
+          </p:cNvPr>
+          <p:cNvSpPr>
+            <a:spLocks noGrp="1"/>
+          </p:cNvSpPr>
+          <p:nvPr>
+            <p:ph idx="13"/>
+          </p:nvPr>
+        </p:nvSpPr>
+        <p:spPr>
+          <a:xfrm>
+            <a:off x="696000" y="1860189"/>
+            <a:ext cx="11496000" cy="4278094"/>
+          </a:xfrm>
+        </p:spPr>
+        <p:txBody>
+          <a:bodyPr/>
+          <a:lstStyle/>
+          <a:p>
+            <a:pPr>
+              <a:spcAft>
+                <a:spcPts val="600"/>
+              </a:spcAft>
+            </a:pPr>
+            <a:r>
+              <a:rPr lang="zh-CN" altLang="en-US" sz="1600" dirty="0">
+                <a:solidFill>
+                  <a:schemeClr val="tx1"/>
+                </a:solidFill>
+                <a:ea typeface="黑体" panose="02010609060101010101" pitchFamily="49" charset="-122"/>
+                <a:cs typeface="Arial" panose="020B0604020202020204" pitchFamily="34" charset="0"/>
+              </a:rPr>
+              <a:t>现在正在针对性的，分析不同</a:t>
+            </a:r>
+            <a:r>
+              <a:rPr lang="en-US" altLang="zh-CN" sz="1600" dirty="0">
+                <a:solidFill>
+                  <a:schemeClr val="tx1"/>
+                </a:solidFill>
+                <a:ea typeface="黑体" panose="02010609060101010101" pitchFamily="49" charset="-122"/>
+                <a:cs typeface="Arial" panose="020B0604020202020204" pitchFamily="34" charset="0"/>
+              </a:rPr>
+              <a:t>NVM</a:t>
+            </a:r>
+            <a:r>
+              <a:rPr lang="zh-CN" altLang="en-US" sz="1600" dirty="0">
+                <a:solidFill>
+                  <a:schemeClr val="tx1"/>
+                </a:solidFill>
+                <a:ea typeface="黑体" panose="02010609060101010101" pitchFamily="49" charset="-122"/>
+                <a:cs typeface="Arial" panose="020B0604020202020204" pitchFamily="34" charset="0"/>
+              </a:rPr>
+              <a:t>存储介质的关键参数</a:t>
+            </a:r>
+            <a:endParaRPr lang="en-US" altLang="zh-CN" sz="1600" dirty="0">
+              <a:solidFill>
+                <a:schemeClr val="tx1"/>
+              </a:solidFill>
+              <a:ea typeface="黑体" panose="02010609060101010101" pitchFamily="49" charset="-122"/>
+              <a:cs typeface="Arial" panose="020B0604020202020204" pitchFamily="34" charset="0"/>
+            </a:endParaRPr>
+          </a:p>
+          <a:p>
+            <a:pPr>
+              <a:spcAft>
+                <a:spcPts val="600"/>
+              </a:spcAft>
+            </a:pPr>
+            <a:endParaRPr lang="en-US" altLang="zh-CN" sz="1600" dirty="0">
+              <a:solidFill>
+                <a:schemeClr val="tx1"/>
+              </a:solidFill>
+              <a:ea typeface="黑体" panose="02010609060101010101" pitchFamily="49" charset="-122"/>
+              <a:cs typeface="Arial" panose="020B0604020202020204" pitchFamily="34" charset="0"/>
+            </a:endParaRPr>
+          </a:p>
+          <a:p>
+            <a:pPr>
+              <a:spcAft>
+                <a:spcPts val="600"/>
+              </a:spcAft>
+            </a:pPr>
+            <a:r>
+              <a:rPr lang="zh-CN" altLang="en-US" sz="1600" dirty="0">
+                <a:solidFill>
+                  <a:schemeClr val="tx1"/>
+                </a:solidFill>
+                <a:ea typeface="黑体" panose="02010609060101010101" pitchFamily="49" charset="-122"/>
+                <a:cs typeface="Arial" panose="020B0604020202020204" pitchFamily="34" charset="0"/>
+              </a:rPr>
+              <a:t>不同的</a:t>
+            </a:r>
+            <a:r>
+              <a:rPr lang="en-US" altLang="zh-CN" sz="1600" dirty="0">
+                <a:solidFill>
+                  <a:schemeClr val="tx1"/>
+                </a:solidFill>
+                <a:ea typeface="黑体" panose="02010609060101010101" pitchFamily="49" charset="-122"/>
+                <a:cs typeface="Arial" panose="020B0604020202020204" pitchFamily="34" charset="0"/>
+              </a:rPr>
+              <a:t>10</a:t>
+            </a:r>
+            <a:r>
+              <a:rPr lang="zh-CN" altLang="en-US" sz="1600" dirty="0">
+                <a:solidFill>
+                  <a:schemeClr val="tx1"/>
+                </a:solidFill>
+                <a:ea typeface="黑体" panose="02010609060101010101" pitchFamily="49" charset="-122"/>
+                <a:cs typeface="Arial" panose="020B0604020202020204" pitchFamily="34" charset="0"/>
+              </a:rPr>
+              <a:t>种代表性</a:t>
+            </a:r>
+            <a:r>
+              <a:rPr lang="en-US" altLang="zh-CN" sz="1600" dirty="0">
+                <a:solidFill>
+                  <a:schemeClr val="tx1"/>
+                </a:solidFill>
+                <a:ea typeface="黑体" panose="02010609060101010101" pitchFamily="49" charset="-122"/>
+                <a:cs typeface="Arial" panose="020B0604020202020204" pitchFamily="34" charset="0"/>
+              </a:rPr>
+              <a:t>NVM</a:t>
+            </a:r>
+            <a:r>
+              <a:rPr lang="zh-CN" altLang="en-US" sz="1600" dirty="0">
+                <a:solidFill>
+                  <a:schemeClr val="tx1"/>
+                </a:solidFill>
+                <a:ea typeface="黑体" panose="02010609060101010101" pitchFamily="49" charset="-122"/>
+                <a:cs typeface="Arial" panose="020B0604020202020204" pitchFamily="34" charset="0"/>
+              </a:rPr>
+              <a:t>介质：</a:t>
+            </a:r>
+            <a:endParaRPr lang="en-US" altLang="zh-CN" sz="1600" dirty="0">
+              <a:solidFill>
+                <a:schemeClr val="tx1"/>
+              </a:solidFill>
+              <a:ea typeface="黑体" panose="02010609060101010101" pitchFamily="49" charset="-122"/>
+              <a:cs typeface="Arial" panose="020B0604020202020204" pitchFamily="34" charset="0"/>
+            </a:endParaRPr>
+          </a:p>
+          <a:p>
+            <a:pPr>
+              <a:spcAft>
+                <a:spcPts val="600"/>
+              </a:spcAft>
+            </a:pPr>
+            <a:r>
+              <a:rPr lang="en-US" altLang="zh-CN" sz="1600" b="1" dirty="0">
+                <a:solidFill>
+                  <a:schemeClr val="tx1"/>
+                </a:solidFill>
+                <a:ea typeface="黑体" panose="02010609060101010101" pitchFamily="49" charset="-122"/>
+                <a:cs typeface="Arial" panose="020B0604020202020204" pitchFamily="34" charset="0"/>
+              </a:rPr>
+              <a:t>SRAM</a:t>
+            </a:r>
+            <a:r>
+              <a:rPr lang="zh-CN" altLang="en-US" sz="1600" b="1" dirty="0">
+                <a:solidFill>
+                  <a:schemeClr val="tx1"/>
+                </a:solidFill>
+                <a:ea typeface="黑体" panose="02010609060101010101" pitchFamily="49" charset="-122"/>
+                <a:cs typeface="Arial" panose="020B0604020202020204" pitchFamily="34" charset="0"/>
+              </a:rPr>
+              <a:t> </a:t>
+            </a:r>
+            <a:r>
+              <a:rPr lang="en-US" altLang="zh-CN" sz="1600" b="1" dirty="0">
+                <a:solidFill>
+                  <a:schemeClr val="tx1"/>
+                </a:solidFill>
+                <a:ea typeface="黑体" panose="02010609060101010101" pitchFamily="49" charset="-122"/>
+                <a:cs typeface="Arial" panose="020B0604020202020204" pitchFamily="34" charset="0"/>
+              </a:rPr>
+              <a:t>DCIM</a:t>
+            </a:r>
+          </a:p>
+          <a:p>
+            <a:pPr>
+              <a:spcAft>
+                <a:spcPts val="600"/>
+              </a:spcAft>
+            </a:pPr>
+            <a:r>
+              <a:rPr lang="en-US" altLang="zh-CN" sz="1600" b="1" dirty="0">
+                <a:solidFill>
+                  <a:schemeClr val="tx1"/>
+                </a:solidFill>
+                <a:ea typeface="黑体" panose="02010609060101010101" pitchFamily="49" charset="-122"/>
+                <a:cs typeface="Arial" panose="020B0604020202020204" pitchFamily="34" charset="0"/>
+              </a:rPr>
+              <a:t>SRAM</a:t>
+            </a:r>
+            <a:r>
+              <a:rPr lang="zh-CN" altLang="en-US" sz="1600" b="1" dirty="0">
+                <a:solidFill>
+                  <a:schemeClr val="tx1"/>
+                </a:solidFill>
+                <a:ea typeface="黑体" panose="02010609060101010101" pitchFamily="49" charset="-122"/>
+                <a:cs typeface="Arial" panose="020B0604020202020204" pitchFamily="34" charset="0"/>
+              </a:rPr>
+              <a:t> </a:t>
+            </a:r>
+            <a:r>
+              <a:rPr lang="en-US" altLang="zh-CN" sz="1600" b="1" dirty="0">
+                <a:solidFill>
+                  <a:schemeClr val="tx1"/>
+                </a:solidFill>
+                <a:ea typeface="黑体" panose="02010609060101010101" pitchFamily="49" charset="-122"/>
+                <a:cs typeface="Arial" panose="020B0604020202020204" pitchFamily="34" charset="0"/>
+              </a:rPr>
+              <a:t>ACIM</a:t>
+            </a:r>
+          </a:p>
+          <a:p>
+            <a:pPr>
+              <a:spcAft>
+                <a:spcPts val="600"/>
+              </a:spcAft>
+            </a:pPr>
+            <a:r>
+              <a:rPr lang="en-US" altLang="zh-CN" sz="1600" b="1" dirty="0">
+                <a:solidFill>
+                  <a:schemeClr val="tx1"/>
+                </a:solidFill>
+                <a:ea typeface="黑体" panose="02010609060101010101" pitchFamily="49" charset="-122"/>
+                <a:cs typeface="Arial" panose="020B0604020202020204" pitchFamily="34" charset="0"/>
+              </a:rPr>
+              <a:t>2D</a:t>
+            </a:r>
+            <a:r>
+              <a:rPr lang="zh-CN" altLang="en-US" sz="1600" b="1" dirty="0">
+                <a:solidFill>
+                  <a:schemeClr val="tx1"/>
+                </a:solidFill>
+                <a:ea typeface="黑体" panose="02010609060101010101" pitchFamily="49" charset="-122"/>
+                <a:cs typeface="Arial" panose="020B0604020202020204" pitchFamily="34" charset="0"/>
+              </a:rPr>
+              <a:t> </a:t>
+            </a:r>
+            <a:r>
+              <a:rPr lang="en-US" altLang="zh-CN" sz="1600" b="1" dirty="0">
+                <a:solidFill>
+                  <a:schemeClr val="tx1"/>
+                </a:solidFill>
+                <a:ea typeface="黑体" panose="02010609060101010101" pitchFamily="49" charset="-122"/>
+                <a:cs typeface="Arial" panose="020B0604020202020204" pitchFamily="34" charset="0"/>
+              </a:rPr>
+              <a:t>NOR</a:t>
+            </a:r>
+          </a:p>
+          <a:p>
+            <a:pPr>
+              <a:spcAft>
+                <a:spcPts val="600"/>
+              </a:spcAft>
+            </a:pPr>
+            <a:r>
+              <a:rPr lang="en-US" altLang="zh-CN" sz="1600" b="1" dirty="0">
+                <a:solidFill>
+                  <a:schemeClr val="tx1"/>
+                </a:solidFill>
+                <a:ea typeface="黑体" panose="02010609060101010101" pitchFamily="49" charset="-122"/>
+                <a:cs typeface="Arial" panose="020B0604020202020204" pitchFamily="34" charset="0"/>
+              </a:rPr>
+              <a:t>3D</a:t>
+            </a:r>
+            <a:r>
+              <a:rPr lang="zh-CN" altLang="en-US" sz="1600" b="1" dirty="0">
+                <a:solidFill>
+                  <a:schemeClr val="tx1"/>
+                </a:solidFill>
+                <a:ea typeface="黑体" panose="02010609060101010101" pitchFamily="49" charset="-122"/>
+                <a:cs typeface="Arial" panose="020B0604020202020204" pitchFamily="34" charset="0"/>
+              </a:rPr>
+              <a:t> </a:t>
+            </a:r>
+            <a:r>
+              <a:rPr lang="en-US" altLang="zh-CN" sz="1600" b="1" dirty="0">
+                <a:solidFill>
+                  <a:schemeClr val="tx1"/>
+                </a:solidFill>
+                <a:ea typeface="黑体" panose="02010609060101010101" pitchFamily="49" charset="-122"/>
+                <a:cs typeface="Arial" panose="020B0604020202020204" pitchFamily="34" charset="0"/>
+              </a:rPr>
+              <a:t>NAND</a:t>
+            </a:r>
+          </a:p>
+          <a:p>
+            <a:pPr>
+              <a:spcAft>
+                <a:spcPts val="600"/>
+              </a:spcAft>
+            </a:pPr>
+            <a:r>
+              <a:rPr lang="en-US" altLang="zh-CN" sz="1600" b="1" dirty="0">
+                <a:solidFill>
+                  <a:schemeClr val="tx1"/>
+                </a:solidFill>
+                <a:ea typeface="黑体" panose="02010609060101010101" pitchFamily="49" charset="-122"/>
+                <a:cs typeface="Arial" panose="020B0604020202020204" pitchFamily="34" charset="0"/>
+              </a:rPr>
+              <a:t>RRAM</a:t>
+            </a:r>
+          </a:p>
+          <a:p>
+            <a:pPr>
+              <a:spcAft>
+                <a:spcPts val="600"/>
+              </a:spcAft>
+            </a:pPr>
+            <a:r>
+              <a:rPr lang="en-US" altLang="zh-CN" sz="1600" b="1" dirty="0">
+                <a:solidFill>
+                  <a:schemeClr val="tx1"/>
+                </a:solidFill>
+                <a:ea typeface="黑体" panose="02010609060101010101" pitchFamily="49" charset="-122"/>
+                <a:cs typeface="Arial" panose="020B0604020202020204" pitchFamily="34" charset="0"/>
+              </a:rPr>
+              <a:t>MRAM</a:t>
+            </a:r>
+          </a:p>
+          <a:p>
+            <a:pPr>
+              <a:spcAft>
+                <a:spcPts val="600"/>
+              </a:spcAft>
+            </a:pPr>
+            <a:r>
+              <a:rPr lang="en-US" altLang="zh-CN" sz="1600" b="1" dirty="0">
+                <a:solidFill>
+                  <a:schemeClr val="tx1"/>
+                </a:solidFill>
+                <a:ea typeface="黑体" panose="02010609060101010101" pitchFamily="49" charset="-122"/>
+                <a:cs typeface="Arial" panose="020B0604020202020204" pitchFamily="34" charset="0"/>
+              </a:rPr>
+              <a:t>PCM</a:t>
+            </a:r>
+          </a:p>
+          <a:p>
+            <a:pPr>
+              <a:spcAft>
+                <a:spcPts val="600"/>
+              </a:spcAft>
+            </a:pPr>
+            <a:r>
+              <a:rPr lang="en-US" altLang="zh-CN" sz="1600" b="1" dirty="0" err="1">
+                <a:solidFill>
+                  <a:schemeClr val="tx1"/>
+                </a:solidFill>
+                <a:ea typeface="黑体" panose="02010609060101010101" pitchFamily="49" charset="-122"/>
+                <a:cs typeface="Arial" panose="020B0604020202020204" pitchFamily="34" charset="0"/>
+              </a:rPr>
+              <a:t>FeRAM</a:t>
+            </a:r>
+            <a:endParaRPr lang="en-US" altLang="zh-CN" sz="1600" b="1" dirty="0">
+              <a:solidFill>
+                <a:schemeClr val="tx1"/>
+              </a:solidFill>
+              <a:ea typeface="黑体" panose="02010609060101010101" pitchFamily="49" charset="-122"/>
+              <a:cs typeface="Arial" panose="020B0604020202020204" pitchFamily="34" charset="0"/>
+            </a:endParaRPr>
+          </a:p>
+          <a:p>
+            <a:pPr>
+              <a:spcAft>
+                <a:spcPts val="600"/>
+              </a:spcAft>
+            </a:pPr>
+            <a:r>
+              <a:rPr lang="en-US" altLang="zh-CN" sz="1600" b="1" dirty="0" err="1">
+                <a:solidFill>
+                  <a:schemeClr val="tx1"/>
+                </a:solidFill>
+                <a:ea typeface="黑体" panose="02010609060101010101" pitchFamily="49" charset="-122"/>
+                <a:cs typeface="Arial" panose="020B0604020202020204" pitchFamily="34" charset="0"/>
+              </a:rPr>
+              <a:t>eDRAM</a:t>
+            </a:r>
+            <a:endParaRPr lang="en-US" altLang="zh-CN" sz="1600" b="1" dirty="0">
+              <a:solidFill>
+                <a:schemeClr val="tx1"/>
+              </a:solidFill>
+              <a:ea typeface="黑体" panose="02010609060101010101" pitchFamily="49" charset="-122"/>
+              <a:cs typeface="Arial" panose="020B0604020202020204" pitchFamily="34" charset="0"/>
+            </a:endParaRPr>
+          </a:p>
+          <a:p>
+            <a:pPr>
+              <a:spcAft>
+                <a:spcPts val="600"/>
+              </a:spcAft>
+            </a:pPr>
+            <a:r>
+              <a:rPr lang="en-US" altLang="zh-CN" sz="1600" b="1" dirty="0">
+                <a:solidFill>
+                  <a:schemeClr val="tx1"/>
+                </a:solidFill>
+                <a:ea typeface="黑体" panose="02010609060101010101" pitchFamily="49" charset="-122"/>
+                <a:cs typeface="Arial" panose="020B0604020202020204" pitchFamily="34" charset="0"/>
+              </a:rPr>
+              <a:t>FeNOR</a:t>
+            </a:r>
+          </a:p>
+        </p:txBody>
+      </p:sp>
+      <p:pic>
+        <p:nvPicPr>
+          <p:cNvPr id="6" name="图片 5">
+            <a:extLst>
+              <a:ext uri="{FF2B5EF4-FFF2-40B4-BE49-F238E27FC236}">
+                <a16:creationId xmlns:a16="http://schemas.microsoft.com/office/drawing/2014/main" id="{AC25EBB9-AE1F-F80B-A8DE-B740F21E5CF0}"/>
+              </a:ext>
+            </a:extLst>
+          </p:cNvPr>
+          <p:cNvPicPr>
+            <a:picLocks noChangeAspect="1"/>
+          </p:cNvPicPr>
+          <p:nvPr/>
+        </p:nvPicPr>
+        <p:blipFill>
+          <a:blip r:embed="rId3"/>
+          <a:stretch>
+            <a:fillRect/>
+          </a:stretch>
+        </p:blipFill>
+        <p:spPr>
+          <a:xfrm>
+            <a:off x="6261431" y="1055076"/>
+            <a:ext cx="4298129" cy="5737029"/>
+          </a:xfrm>
+          <a:prstGeom prst="rect">
+            <a:avLst/>
+          </a:prstGeom>
+        </p:spPr>
+      </p:pic>
+    </p:spTree>
+    <p:extLst>
+      <p:ext uri="{BB962C8B-B14F-4D97-AF65-F5344CB8AC3E}">
+        <p14:creationId xmlns:p14="http://schemas.microsoft.com/office/powerpoint/2010/main" val="1139044376"/>
       </p:ext>
     </p:extLst>
   </p:cSld>
@@ -5406,8 +6584,8 @@
           </a:p>
         </p:txBody>
       </p:sp>
-      <mc:AlternateContent xmlns:mc="http://schemas.openxmlformats.org/markup-compatibility/2006">
-        <mc:Choice xmlns:a14="http://schemas.microsoft.com/office/drawing/2010/main" Requires="a14">
+      <mc:AlternateContent xmlns:mc="http://schemas.openxmlformats.org/markup-compatibility/2006" xmlns:a14="http://schemas.microsoft.com/office/drawing/2010/main">
+        <mc:Choice Requires="a14">
           <p:graphicFrame>
             <p:nvGraphicFramePr>
               <p:cNvPr id="6" name="表格 5">
@@ -5757,40 +6935,56 @@
                           <a14:m>
                             <m:oMath xmlns:m="http://schemas.openxmlformats.org/officeDocument/2006/math">
                               <m:r>
-                                <a:rPr lang="zh-CN" altLang="en-US" sz="1600"/>
+                                <a:rPr lang="zh-CN" altLang="en-US" sz="1600">
+                                  <a:latin typeface="Cambria Math" panose="02040503050406030204" pitchFamily="18" charset="0"/>
+                                </a:rPr>
                                 <m:t>𝜌</m:t>
                               </m:r>
                               <m:r>
-                                <a:rPr lang="en-US" altLang="zh-CN" sz="1600"/>
+                                <a:rPr lang="en-US" altLang="zh-CN" sz="1600">
+                                  <a:latin typeface="Cambria Math" panose="02040503050406030204" pitchFamily="18" charset="0"/>
+                                </a:rPr>
                                 <m:t>,</m:t>
                               </m:r>
                               <m:r>
-                                <a:rPr lang="zh-CN" altLang="en-US" sz="1600"/>
+                                <a:rPr lang="zh-CN" altLang="en-US" sz="1600">
+                                  <a:latin typeface="Cambria Math" panose="02040503050406030204" pitchFamily="18" charset="0"/>
+                                </a:rPr>
                                 <m:t>𝜏</m:t>
                               </m:r>
                               <m:r>
-                                <a:rPr lang="en-US" altLang="zh-CN" sz="1600"/>
+                                <a:rPr lang="en-US" altLang="zh-CN" sz="1600">
+                                  <a:latin typeface="Cambria Math" panose="02040503050406030204" pitchFamily="18" charset="0"/>
+                                </a:rPr>
                                 <m:t>,</m:t>
                               </m:r>
                               <m:r>
-                                <a:rPr lang="zh-CN" altLang="en-US" sz="1600"/>
+                                <a:rPr lang="zh-CN" altLang="en-US" sz="1600">
+                                  <a:latin typeface="Cambria Math" panose="02040503050406030204" pitchFamily="18" charset="0"/>
+                                </a:rPr>
                                 <m:t>𝑅</m:t>
                               </m:r>
                               <m:sSup>
                                 <m:sSupPr>
                                   <m:ctrlPr>
-                                    <a:rPr lang="zh-CN" altLang="en-US" sz="1600"/>
+                                    <a:rPr lang="zh-CN" altLang="en-US" sz="1600">
+                                      <a:latin typeface="Cambria Math" panose="02040503050406030204" pitchFamily="18" charset="0"/>
+                                    </a:rPr>
                                   </m:ctrlPr>
                                 </m:sSupPr>
                                 <m:e>
                                   <m:r>
-                                    <a:rPr lang="zh-CN" altLang="en-US" sz="1600"/>
+                                    <a:rPr lang="zh-CN" altLang="en-US" sz="1600">
+                                      <a:latin typeface="Cambria Math" panose="02040503050406030204" pitchFamily="18" charset="0"/>
+                                    </a:rPr>
                                     <m:t>𝐼</m:t>
                                   </m:r>
                                 </m:e>
                                 <m:sup>
                                   <m:r>
-                                    <a:rPr lang="zh-CN" altLang="en-US" sz="1600"/>
+                                    <a:rPr lang="zh-CN" altLang="en-US" sz="1600">
+                                      <a:latin typeface="Cambria Math" panose="02040503050406030204" pitchFamily="18" charset="0"/>
+                                    </a:rPr>
                                     <m:t>∗</m:t>
                                   </m:r>
                                 </m:sup>
@@ -5885,51 +7079,69 @@
                               <m:sSub>
                                 <m:sSubPr>
                                   <m:ctrlPr>
-                                    <a:rPr lang="zh-CN" altLang="en-US" sz="1600"/>
+                                    <a:rPr lang="zh-CN" altLang="en-US" sz="1600">
+                                      <a:latin typeface="Cambria Math" panose="02040503050406030204" pitchFamily="18" charset="0"/>
+                                    </a:rPr>
                                   </m:ctrlPr>
                                 </m:sSubPr>
                                 <m:e>
                                   <m:r>
-                                    <a:rPr lang="zh-CN" altLang="en-US" sz="1600"/>
+                                    <a:rPr lang="zh-CN" altLang="en-US" sz="1600">
+                                      <a:latin typeface="Cambria Math" panose="02040503050406030204" pitchFamily="18" charset="0"/>
+                                    </a:rPr>
                                     <m:t>𝑄</m:t>
                                   </m:r>
                                 </m:e>
                                 <m:sub>
                                   <m:r>
-                                    <a:rPr lang="zh-CN" altLang="en-US" sz="1600"/>
+                                    <a:rPr lang="zh-CN" altLang="en-US" sz="1600">
+                                      <a:latin typeface="Cambria Math" panose="02040503050406030204" pitchFamily="18" charset="0"/>
+                                    </a:rPr>
                                     <m:t>𝑅</m:t>
                                   </m:r>
                                 </m:sub>
                               </m:sSub>
                               <m:r>
-                                <a:rPr lang="en-US" altLang="zh-CN" sz="1600"/>
+                                <a:rPr lang="en-US" altLang="zh-CN" sz="1600">
+                                  <a:latin typeface="Cambria Math" panose="02040503050406030204" pitchFamily="18" charset="0"/>
+                                </a:rPr>
                                 <m:t>,</m:t>
                               </m:r>
                               <m:sSub>
                                 <m:sSubPr>
                                   <m:ctrlPr>
-                                    <a:rPr lang="zh-CN" altLang="en-US" sz="1600"/>
+                                    <a:rPr lang="zh-CN" altLang="en-US" sz="1600">
+                                      <a:latin typeface="Cambria Math" panose="02040503050406030204" pitchFamily="18" charset="0"/>
+                                    </a:rPr>
                                   </m:ctrlPr>
                                 </m:sSubPr>
                                 <m:e>
                                   <m:r>
-                                    <a:rPr lang="zh-CN" altLang="en-US" sz="1600"/>
+                                    <a:rPr lang="zh-CN" altLang="en-US" sz="1600">
+                                      <a:latin typeface="Cambria Math" panose="02040503050406030204" pitchFamily="18" charset="0"/>
+                                    </a:rPr>
                                     <m:t>𝑄</m:t>
                                   </m:r>
                                 </m:e>
                                 <m:sub>
                                   <m:r>
-                                    <a:rPr lang="zh-CN" altLang="en-US" sz="1600"/>
+                                    <a:rPr lang="zh-CN" altLang="en-US" sz="1600">
+                                      <a:latin typeface="Cambria Math" panose="02040503050406030204" pitchFamily="18" charset="0"/>
+                                    </a:rPr>
                                     <m:t>𝑆</m:t>
                                   </m:r>
                                 </m:sub>
                               </m:sSub>
                               <m:r>
-                                <a:rPr lang="en-US" altLang="zh-CN" sz="1600"/>
+                                <a:rPr lang="en-US" altLang="zh-CN" sz="1600">
+                                  <a:latin typeface="Cambria Math" panose="02040503050406030204" pitchFamily="18" charset="0"/>
+                                </a:rPr>
                                 <m:t>,</m:t>
                               </m:r>
                               <m:r>
-                                <a:rPr lang="zh-CN" altLang="en-US" sz="1600"/>
+                                <a:rPr lang="zh-CN" altLang="en-US" sz="1600">
+                                  <a:latin typeface="Cambria Math" panose="02040503050406030204" pitchFamily="18" charset="0"/>
+                                </a:rPr>
                                 <m:t>𝑅𝐼</m:t>
                               </m:r>
                             </m:oMath>
@@ -6131,7 +7343,7 @@
             </a:graphic>
           </p:graphicFrame>
         </mc:Choice>
-        <mc:Fallback>
+        <mc:Fallback xmlns="">
           <p:graphicFrame>
             <p:nvGraphicFramePr>
               <p:cNvPr id="6" name="表格 5">
